--- a/From-AI-Discovery-to-Measurement.pptx
+++ b/From-AI-Discovery-to-Measurement.pptx
@@ -4830,7 +4830,7 @@
                       <a:r>
                         <a:rPr lang="en-US" sz="1250" dirty="0">
                           <a:solidFill>
-                            <a:srgbClr val="9AA5C9"/>
+                            <a:srgbClr val="FFFFFF"/>
                           </a:solidFill>
                           <a:latin typeface="Calibri" pitchFamily="34" charset="0"/>
                           <a:ea typeface="Calibri" pitchFamily="34" charset="-122"/>
@@ -13839,7 +13839,7 @@
         <p:spPr>
           <a:xfrm>
             <a:off x="7452360" y="4343400"/>
-            <a:ext cx="4206240" cy="548640"/>
+            <a:ext cx="4206240" cy="1600200"/>
           </a:xfrm>
           <a:prstGeom prst="rect">
             <a:avLst/>
@@ -13867,6 +13867,26 @@
                 <a:cs typeface="Calibri" pitchFamily="34" charset="-120"/>
               </a:rPr>
               <a:t>Source: L'Oréal Annual Reports, 2021–2024; 2025 Universal Registration Document.</a:t>
+            </a:r>
+            <a:endParaRPr lang="en-US" sz="1100" dirty="0"/>
+          </a:p>
+          <a:p>
+            <a:pPr indent="0" marL="0">
+              <a:lnSpc>
+                <a:spcPct val="120000"/>
+              </a:lnSpc>
+              <a:buNone/>
+            </a:pPr>
+            <a:r>
+              <a:rPr lang="en-US" sz="1100" i="1" dirty="0">
+                <a:solidFill>
+                  <a:srgbClr val="8FA0D9"/>
+                </a:solidFill>
+                <a:latin typeface="Calibri" pitchFamily="34" charset="0"/>
+                <a:ea typeface="Calibri" pitchFamily="34" charset="-122"/>
+                <a:cs typeface="Calibri" pitchFamily="34" charset="-120"/>
+              </a:rPr>
+              <a:t>E-commerce figures are L'Oréal-reported; the underlying KPI uses non-audited self-reported data. E-commerce growth is reported on a like-for-like basis. 2022 and 2023 shares were disclosed as whole percentages.</a:t>
             </a:r>
             <a:endParaRPr lang="en-US" sz="1100" dirty="0"/>
           </a:p>

--- a/From-AI-Discovery-to-Measurement.pptx
+++ b/From-AI-Discovery-to-Measurement.pptx
@@ -2937,6 +2937,10 @@
           </a:solidFill>
           <a:ln/>
         </p:spPr>
+        <p:txBody>
+          <a:bodyPr/>
+          <a:p/>
+        </p:txBody>
       </p:sp>
       <p:pic>
         <p:nvPicPr>
@@ -2982,6 +2986,10 @@
           </a:solidFill>
           <a:ln/>
         </p:spPr>
+        <p:txBody>
+          <a:bodyPr/>
+          <a:p/>
+        </p:txBody>
       </p:sp>
       <p:sp>
         <p:nvSpPr>
@@ -3106,6 +3114,10 @@
             <a:prstDash val="solid"/>
           </a:ln>
         </p:spPr>
+        <p:txBody>
+          <a:bodyPr/>
+          <a:p/>
+        </p:txBody>
       </p:sp>
       <p:sp>
         <p:nvSpPr>
@@ -3143,7 +3155,7 @@
                 <a:ea typeface="Calibri" pitchFamily="34" charset="-122"/>
                 <a:cs typeface="Calibri" pitchFamily="34" charset="-120"/>
               </a:rPr>
-              <a:t>How L'Oréal could extend its existing measurement capabilities into conversational AI discovery — without needing to own the AI touchpoint.</a:t>
+              <a:t>How L'Oréal could extend its existing measurement capabilities into conversational AI discovery, without needing to own the AI touchpoint.</a:t>
             </a:r>
             <a:endParaRPr lang="en-US" sz="1350" dirty="0"/>
           </a:p>
@@ -3266,6 +3278,10 @@
           </a:solidFill>
           <a:ln/>
         </p:spPr>
+        <p:txBody>
+          <a:bodyPr/>
+          <a:p/>
+        </p:txBody>
       </p:sp>
       <p:sp>
         <p:nvSpPr>
@@ -3293,6 +3309,10 @@
             <a:prstDash val="solid"/>
           </a:ln>
         </p:spPr>
+        <p:txBody>
+          <a:bodyPr/>
+          <a:p/>
+        </p:txBody>
       </p:sp>
       <p:sp>
         <p:nvSpPr>
@@ -3400,6 +3420,10 @@
             <a:prstDash val="solid"/>
           </a:ln>
         </p:spPr>
+        <p:txBody>
+          <a:bodyPr/>
+          <a:p/>
+        </p:txBody>
       </p:sp>
       <p:sp>
         <p:nvSpPr>
@@ -3507,6 +3531,10 @@
             <a:prstDash val="solid"/>
           </a:ln>
         </p:spPr>
+        <p:txBody>
+          <a:bodyPr/>
+          <a:p/>
+        </p:txBody>
       </p:sp>
       <p:sp>
         <p:nvSpPr>
@@ -5087,6 +5115,10 @@
           </a:solidFill>
           <a:ln/>
         </p:spPr>
+        <p:txBody>
+          <a:bodyPr/>
+          <a:p/>
+        </p:txBody>
       </p:sp>
       <p:sp>
         <p:nvSpPr>
@@ -5114,6 +5146,10 @@
             <a:prstDash val="solid"/>
           </a:ln>
         </p:spPr>
+        <p:txBody>
+          <a:bodyPr/>
+          <a:p/>
+        </p:txBody>
       </p:sp>
       <p:sp>
         <p:nvSpPr>
@@ -5148,7 +5184,7 @@
                 <a:ea typeface="Arial" pitchFamily="34" charset="-122"/>
                 <a:cs typeface="Arial" pitchFamily="34" charset="-120"/>
               </a:rPr>
-              <a:t>APPENDIX 3 · EXTERNAL CONTEXT — FRED</a:t>
+              <a:t>APPENDIX 3 · EXTERNAL CONTEXT: FRED</a:t>
             </a:r>
             <a:endParaRPr lang="en-US" sz="1000" dirty="0"/>
           </a:p>
@@ -5187,7 +5223,7 @@
                 <a:ea typeface="Arial" pitchFamily="34" charset="-122"/>
                 <a:cs typeface="Arial" pitchFamily="34" charset="-120"/>
               </a:rPr>
-              <a:t>A U.S. RETAIL BENCHMARK — CONTEXTUAL ONLY</a:t>
+              <a:t>A U.S. RETAIL BENCHMARK, CONTEXTUAL ONLY</a:t>
             </a:r>
             <a:endParaRPr lang="en-US" sz="2200" dirty="0"/>
           </a:p>
@@ -6321,6 +6357,10 @@
             <a:prstDash val="solid"/>
           </a:ln>
         </p:spPr>
+        <p:txBody>
+          <a:bodyPr/>
+          <a:p/>
+        </p:txBody>
       </p:sp>
       <p:sp>
         <p:nvSpPr>
@@ -6397,7 +6437,7 @@
                 <a:ea typeface="Calibri" pitchFamily="34" charset="-122"/>
                 <a:cs typeface="Calibri" pitchFamily="34" charset="-120"/>
               </a:rPr>
-              <a:t>Source: FRED series MRTSSM446USS (U.S. Census Bureau via Federal Reserve Economic Data) — monthly, seasonally adjusted, aggregated to annual.</a:t>
+              <a:t>Source: FRED series MRTSSM446USS (U.S. Census Bureau via Federal Reserve Economic Data): monthly, seasonally adjusted, aggregated to annual.</a:t>
             </a:r>
             <a:endParaRPr lang="en-US" sz="950" dirty="0"/>
           </a:p>
@@ -6559,6 +6599,10 @@
           </a:solidFill>
           <a:ln/>
         </p:spPr>
+        <p:txBody>
+          <a:bodyPr/>
+          <a:p/>
+        </p:txBody>
       </p:sp>
       <p:sp>
         <p:nvSpPr>
@@ -6586,6 +6630,10 @@
             <a:prstDash val="solid"/>
           </a:ln>
         </p:spPr>
+        <p:txBody>
+          <a:bodyPr/>
+          <a:p/>
+        </p:txBody>
       </p:sp>
       <p:sp>
         <p:nvSpPr>
@@ -6698,7 +6746,7 @@
                 <a:ea typeface="Calibri" pitchFamily="34" charset="-122"/>
                 <a:cs typeface="Calibri" pitchFamily="34" charset="-120"/>
               </a:rPr>
-              <a:t>Two sides of digital adoption, 2021 vs. 2025 — contextual background, not a L'Oréal benchmark.</a:t>
+              <a:t>Two sides of digital adoption, 2021 vs. 2025: contextual background, not a L'Oréal benchmark.</a:t>
             </a:r>
             <a:endParaRPr lang="en-US" sz="1200" dirty="0"/>
           </a:p>
@@ -6758,7 +6806,7 @@
                 <a:ea typeface="Calibri" pitchFamily="34" charset="-122"/>
                 <a:cs typeface="Calibri" pitchFamily="34" charset="-120"/>
               </a:rPr>
-              <a:t>% of individuals — last online purchase in the last 3 months</a:t>
+              <a:t>% of individuals: last online purchase in the last 3 months</a:t>
             </a:r>
             <a:endParaRPr lang="en-US" sz="1000" dirty="0"/>
           </a:p>
@@ -10204,6 +10252,10 @@
             <a:prstDash val="solid"/>
           </a:ln>
         </p:spPr>
+        <p:txBody>
+          <a:bodyPr/>
+          <a:p/>
+        </p:txBody>
       </p:sp>
       <p:sp>
         <p:nvSpPr>
@@ -10344,7 +10396,7 @@
                 <a:ea typeface="Calibri" pitchFamily="34" charset="-122"/>
                 <a:cs typeface="Calibri" pitchFamily="34" charset="-120"/>
               </a:rPr>
-              <a:t>Same market, opposite movement — a reminder that consumer demand and business-side digital adoption are not interchangeable measures.</a:t>
+              <a:t>Same market, opposite movement: a reminder that consumer demand and business-side digital adoption are not interchangeable measures.</a:t>
             </a:r>
             <a:endParaRPr lang="en-US" sz="1050" dirty="0"/>
           </a:p>
@@ -10545,6 +10597,10 @@
           </a:solidFill>
           <a:ln/>
         </p:spPr>
+        <p:txBody>
+          <a:bodyPr/>
+          <a:p/>
+        </p:txBody>
       </p:sp>
       <p:sp>
         <p:nvSpPr>
@@ -10572,6 +10628,10 @@
             <a:prstDash val="solid"/>
           </a:ln>
         </p:spPr>
+        <p:txBody>
+          <a:bodyPr/>
+          <a:p/>
+        </p:txBody>
       </p:sp>
       <p:sp>
         <p:nvSpPr>
@@ -10718,6 +10778,10 @@
             <a:prstDash val="solid"/>
           </a:ln>
         </p:spPr>
+        <p:txBody>
+          <a:bodyPr/>
+          <a:p/>
+        </p:txBody>
       </p:sp>
       <p:sp>
         <p:nvSpPr>
@@ -12507,6 +12571,10 @@
           </a:solidFill>
           <a:ln/>
         </p:spPr>
+        <p:txBody>
+          <a:bodyPr/>
+          <a:p/>
+        </p:txBody>
       </p:sp>
       <p:sp>
         <p:nvSpPr>
@@ -12534,6 +12602,10 @@
             <a:prstDash val="solid"/>
           </a:ln>
         </p:spPr>
+        <p:txBody>
+          <a:bodyPr/>
+          <a:p/>
+        </p:txBody>
       </p:sp>
       <p:sp>
         <p:nvSpPr>
@@ -12941,7 +13013,7 @@
                           <a:ea typeface="Calibri" pitchFamily="34" charset="-122"/>
                           <a:cs typeface="Calibri" pitchFamily="34" charset="-120"/>
                         </a:rPr>
-                        <a:t>U.S. Census Bureau via FRED — MRTSSM446USS</a:t>
+                        <a:t>U.S. Census Bureau via FRED: MRTSSM446USS</a:t>
                       </a:r>
                       <a:endParaRPr lang="en-US" sz="1250" dirty="0">
                         <a:latin typeface="Calibri" charset="0"/>
@@ -13012,7 +13084,7 @@
                           <a:ea typeface="Calibri" pitchFamily="34" charset="-122"/>
                           <a:cs typeface="Calibri" pitchFamily="34" charset="-120"/>
                         </a:rPr>
-                        <a:t>L'Oréal × OpenAI — 17 June 2026 VivaTech announcement</a:t>
+                        <a:t>L'Oréal × OpenAI: 17 June 2026 VivaTech announcement</a:t>
                       </a:r>
                       <a:endParaRPr lang="en-US" sz="1250" dirty="0">
                         <a:latin typeface="Calibri" charset="0"/>
@@ -13083,7 +13155,7 @@
                           <a:ea typeface="Calibri" pitchFamily="34" charset="-122"/>
                           <a:cs typeface="Calibri" pitchFamily="34" charset="-120"/>
                         </a:rPr>
-                        <a:t>OpenAI — Create Campaigns for ChatGPT Ads</a:t>
+                        <a:t>OpenAI: Create Campaigns for ChatGPT Ads</a:t>
                       </a:r>
                       <a:endParaRPr lang="en-US" sz="1250" dirty="0">
                         <a:latin typeface="Calibri" charset="0"/>
@@ -13154,7 +13226,7 @@
                           <a:ea typeface="Calibri" pitchFamily="34" charset="-122"/>
                           <a:cs typeface="Calibri" pitchFamily="34" charset="-120"/>
                         </a:rPr>
-                        <a:t>OpenAI — Ads in ChatGPT / Measure Results</a:t>
+                        <a:t>OpenAI: Ads in ChatGPT / Measure Results</a:t>
                       </a:r>
                       <a:endParaRPr lang="en-US" sz="1250" dirty="0">
                         <a:latin typeface="Calibri" charset="0"/>
@@ -13225,7 +13297,7 @@
                           <a:ea typeface="Calibri" pitchFamily="34" charset="-122"/>
                           <a:cs typeface="Calibri" pitchFamily="34" charset="-120"/>
                         </a:rPr>
-                        <a:t>OpenAI — Conversion Measurement documentation</a:t>
+                        <a:t>OpenAI: Conversion Measurement documentation</a:t>
                       </a:r>
                       <a:endParaRPr lang="en-US" sz="1250" dirty="0">
                         <a:latin typeface="Calibri" charset="0"/>
@@ -13309,6 +13381,10 @@
             <a:prstDash val="solid"/>
           </a:ln>
         </p:spPr>
+        <p:txBody>
+          <a:bodyPr/>
+          <a:p/>
+        </p:txBody>
       </p:sp>
       <p:sp>
         <p:nvSpPr>
@@ -13508,6 +13584,10 @@
           </a:solidFill>
           <a:ln/>
         </p:spPr>
+        <p:txBody>
+          <a:bodyPr/>
+          <a:p/>
+        </p:txBody>
       </p:sp>
       <p:sp>
         <p:nvSpPr>
@@ -13535,6 +13615,10 @@
             <a:prstDash val="solid"/>
           </a:ln>
         </p:spPr>
+        <p:txBody>
+          <a:bodyPr/>
+          <a:p/>
+        </p:txBody>
       </p:sp>
       <p:sp>
         <p:nvSpPr>
@@ -13736,7 +13820,7 @@
                 <a:ea typeface="Calibri" pitchFamily="34" charset="-122"/>
                 <a:cs typeface="Calibri" pitchFamily="34" charset="-120"/>
               </a:rPr>
-              <a:t>The decline did not mean e-commerce sales were falling — total L'Oréal sales were growing faster in 2022 and 2023.</a:t>
+              <a:t>The decline did not mean e-commerce sales were falling. Total L'Oréal sales were growing faster in 2022 and 2023.</a:t>
             </a:r>
             <a:endParaRPr lang="en-US" sz="1350" dirty="0"/>
           </a:p>
@@ -13770,6 +13854,10 @@
             <a:prstDash val="solid"/>
           </a:ln>
         </p:spPr>
+        <p:txBody>
+          <a:bodyPr/>
+          <a:p/>
+        </p:txBody>
       </p:sp>
       <p:sp>
         <p:nvSpPr>
@@ -13824,7 +13912,7 @@
                 <a:ea typeface="Calibri" pitchFamily="34" charset="-122"/>
                 <a:cs typeface="Calibri" pitchFamily="34" charset="-120"/>
               </a:rPr>
-              <a:t>€13.3bn in e-commerce sales — 30.2% of Group sales.</a:t>
+              <a:t>€13.3bn in e-commerce sales, 30.2% of Group sales.</a:t>
             </a:r>
             <a:endParaRPr lang="en-US" sz="1150" dirty="0"/>
           </a:p>
@@ -14048,6 +14136,10 @@
           </a:solidFill>
           <a:ln/>
         </p:spPr>
+        <p:txBody>
+          <a:bodyPr/>
+          <a:p/>
+        </p:txBody>
       </p:sp>
       <p:sp>
         <p:nvSpPr>
@@ -14075,6 +14167,10 @@
             <a:prstDash val="solid"/>
           </a:ln>
         </p:spPr>
+        <p:txBody>
+          <a:bodyPr/>
+          <a:p/>
+        </p:txBody>
       </p:sp>
       <p:sp>
         <p:nvSpPr>
@@ -14417,6 +14513,10 @@
           </a:solidFill>
           <a:ln/>
         </p:spPr>
+        <p:txBody>
+          <a:bodyPr/>
+          <a:p/>
+        </p:txBody>
       </p:sp>
       <p:sp>
         <p:nvSpPr>
@@ -14451,7 +14551,7 @@
                 <a:ea typeface="Calibri" pitchFamily="34" charset="-122"/>
                 <a:cs typeface="Calibri" pitchFamily="34" charset="-120"/>
               </a:rPr>
-              <a:t>Two metrics moved in opposite directions — this chart does not establish a causal relationship between them.</a:t>
+              <a:t>Two metrics moved in opposite directions. This chart does not establish a causal relationship between them.</a:t>
             </a:r>
             <a:endParaRPr lang="en-US" sz="1050" dirty="0"/>
           </a:p>
@@ -14613,6 +14713,10 @@
           </a:solidFill>
           <a:ln/>
         </p:spPr>
+        <p:txBody>
+          <a:bodyPr/>
+          <a:p/>
+        </p:txBody>
       </p:sp>
       <p:sp>
         <p:nvSpPr>
@@ -14640,6 +14744,10 @@
             <a:prstDash val="solid"/>
           </a:ln>
         </p:spPr>
+        <p:txBody>
+          <a:bodyPr/>
+          <a:p/>
+        </p:txBody>
       </p:sp>
       <p:sp>
         <p:nvSpPr>
@@ -14820,7 +14928,7 @@
                 <a:ea typeface="Calibri" pitchFamily="34" charset="-122"/>
                 <a:cs typeface="Calibri" pitchFamily="34" charset="-120"/>
               </a:rPr>
-              <a:t>The next measurement challenge is different. AI can influence discovery and consideration before a customer reaches a retailer or L'Oréal's own channels — creating a new layer of activity that may be harder to observe.</a:t>
+              <a:t>The next measurement challenge is different. AI can influence discovery and consideration before a customer reaches a retailer or L'Oréal's own channels, creating a new layer of activity that may be harder to observe.</a:t>
             </a:r>
             <a:endParaRPr lang="en-US" sz="1400" dirty="0"/>
           </a:p>
@@ -14854,6 +14962,10 @@
             <a:prstDash val="solid"/>
           </a:ln>
         </p:spPr>
+        <p:txBody>
+          <a:bodyPr/>
+          <a:p/>
+        </p:txBody>
       </p:sp>
       <p:sp>
         <p:nvSpPr>
@@ -15095,6 +15207,10 @@
           </a:solidFill>
           <a:ln/>
         </p:spPr>
+        <p:txBody>
+          <a:bodyPr/>
+          <a:p/>
+        </p:txBody>
       </p:sp>
       <p:sp>
         <p:nvSpPr>
@@ -15122,6 +15238,10 @@
             <a:prstDash val="solid"/>
           </a:ln>
         </p:spPr>
+        <p:txBody>
+          <a:bodyPr/>
+          <a:p/>
+        </p:txBody>
       </p:sp>
       <p:sp>
         <p:nvSpPr>
@@ -15268,6 +15388,10 @@
             <a:prstDash val="solid"/>
           </a:ln>
         </p:spPr>
+        <p:txBody>
+          <a:bodyPr/>
+          <a:p/>
+        </p:txBody>
       </p:sp>
       <p:sp>
         <p:nvSpPr>
@@ -15420,6 +15544,10 @@
             <a:prstDash val="solid"/>
           </a:ln>
         </p:spPr>
+        <p:txBody>
+          <a:bodyPr/>
+          <a:p/>
+        </p:txBody>
       </p:sp>
       <p:sp>
         <p:nvSpPr>
@@ -15538,7 +15666,7 @@
                 <a:ea typeface="Calibri" pitchFamily="34" charset="-122"/>
                 <a:cs typeface="Calibri" pitchFamily="34" charset="-120"/>
               </a:rPr>
-              <a:t>This purchase might have happened even without the AI referral — attribution alone can't tell you.</a:t>
+              <a:t>This purchase might have happened even without the AI referral; attribution alone can't tell you.</a:t>
             </a:r>
             <a:endParaRPr lang="en-US" sz="1300" dirty="0"/>
           </a:p>
@@ -15572,6 +15700,10 @@
             <a:prstDash val="solid"/>
           </a:ln>
         </p:spPr>
+        <p:txBody>
+          <a:bodyPr/>
+          <a:p/>
+        </p:txBody>
       </p:sp>
       <p:sp>
         <p:nvSpPr>
@@ -15768,6 +15900,10 @@
           </a:solidFill>
           <a:ln/>
         </p:spPr>
+        <p:txBody>
+          <a:bodyPr/>
+          <a:p/>
+        </p:txBody>
       </p:sp>
       <p:sp>
         <p:nvSpPr>
@@ -15795,6 +15931,10 @@
             <a:prstDash val="solid"/>
           </a:ln>
         </p:spPr>
+        <p:txBody>
+          <a:bodyPr/>
+          <a:p/>
+        </p:txBody>
       </p:sp>
       <p:sp>
         <p:nvSpPr>
@@ -15907,7 +16047,7 @@
                 <a:ea typeface="Calibri" pitchFamily="34" charset="-122"/>
                 <a:cs typeface="Calibri" pitchFamily="34" charset="-120"/>
               </a:rPr>
-              <a:t>Estimating a credible MDE depends on data and design inputs — here's which ones public data can and can't provide.</a:t>
+              <a:t>Estimating a credible MDE depends on data and design inputs. Here's which ones public data can and can't provide.</a:t>
             </a:r>
             <a:endParaRPr lang="en-US" sz="1300" dirty="0"/>
           </a:p>
@@ -17378,6 +17518,10 @@
           </a:solidFill>
           <a:ln/>
         </p:spPr>
+        <p:txBody>
+          <a:bodyPr/>
+          <a:p/>
+        </p:txBody>
       </p:sp>
       <p:sp>
         <p:nvSpPr>
@@ -17405,6 +17549,10 @@
             <a:prstDash val="solid"/>
           </a:ln>
         </p:spPr>
+        <p:txBody>
+          <a:bodyPr/>
+          <a:p/>
+        </p:txBody>
       </p:sp>
       <p:sp>
         <p:nvSpPr>
@@ -17503,7 +17651,7 @@
                 <a:ea typeface="Arial" pitchFamily="34" charset="-122"/>
                 <a:cs typeface="Arial" pitchFamily="34" charset="-120"/>
               </a:rPr>
-              <a:t>WHAT COULD BE MEASURED — AND WHAT STILL REQUIRES DATA</a:t>
+              <a:t>WHAT COULD BE MEASURED, AND WHAT STILL REQUIRES DATA</a:t>
             </a:r>
             <a:endParaRPr lang="en-US" sz="2300" dirty="0"/>
           </a:p>
@@ -17542,7 +17690,7 @@
                 <a:ea typeface="Calibri" pitchFamily="34" charset="-122"/>
                 <a:cs typeface="Calibri" pitchFamily="34" charset="-120"/>
               </a:rPr>
-              <a:t>A proposed framework — not a description of L'Oréal's current measurement systems.</a:t>
+              <a:t>A proposed framework, not a description of L'Oréal's current measurement systems.</a:t>
             </a:r>
             <a:endParaRPr lang="en-US" sz="1300" dirty="0"/>
           </a:p>
@@ -17576,6 +17724,10 @@
             <a:prstDash val="solid"/>
           </a:ln>
         </p:spPr>
+        <p:txBody>
+          <a:bodyPr/>
+          <a:p/>
+        </p:txBody>
       </p:sp>
       <p:sp>
         <p:nvSpPr>
@@ -17714,7 +17866,7 @@
                 <a:ea typeface="Calibri" pitchFamily="34" charset="-122"/>
                 <a:cs typeface="Calibri" pitchFamily="34" charset="-120"/>
               </a:rPr>
-              <a:t>Share of standardized test prompts producing a L'Oréal brand/product mention — not real consumer exposure</a:t>
+              <a:t>Share of standardized test prompts producing a L'Oréal brand/product mention; not real consumer exposure</a:t>
             </a:r>
             <a:endParaRPr lang="en-US" sz="800" dirty="0"/>
           </a:p>
@@ -17742,6 +17894,10 @@
             <a:prstDash val="solid"/>
           </a:ln>
         </p:spPr>
+        <p:txBody>
+          <a:bodyPr/>
+          <a:p/>
+        </p:txBody>
       </p:sp>
       <p:sp>
         <p:nvSpPr>
@@ -17771,6 +17927,10 @@
             <a:prstDash val="solid"/>
           </a:ln>
         </p:spPr>
+        <p:txBody>
+          <a:bodyPr/>
+          <a:p/>
+        </p:txBody>
       </p:sp>
       <p:sp>
         <p:nvSpPr>
@@ -17937,6 +18097,10 @@
             <a:prstDash val="solid"/>
           </a:ln>
         </p:spPr>
+        <p:txBody>
+          <a:bodyPr/>
+          <a:p/>
+        </p:txBody>
       </p:sp>
       <p:sp>
         <p:nvSpPr>
@@ -17966,6 +18130,10 @@
             <a:prstDash val="solid"/>
           </a:ln>
         </p:spPr>
+        <p:txBody>
+          <a:bodyPr/>
+          <a:p/>
+        </p:txBody>
       </p:sp>
       <p:sp>
         <p:nvSpPr>
@@ -18112,6 +18280,10 @@
             <a:prstDash val="solid"/>
           </a:ln>
         </p:spPr>
+        <p:txBody>
+          <a:bodyPr/>
+          <a:p/>
+        </p:txBody>
       </p:sp>
       <p:sp>
         <p:nvSpPr>
@@ -18141,6 +18313,10 @@
             <a:prstDash val="solid"/>
           </a:ln>
         </p:spPr>
+        <p:txBody>
+          <a:bodyPr/>
+          <a:p/>
+        </p:txBody>
       </p:sp>
       <p:sp>
         <p:nvSpPr>
@@ -18307,6 +18483,10 @@
             <a:prstDash val="solid"/>
           </a:ln>
         </p:spPr>
+        <p:txBody>
+          <a:bodyPr/>
+          <a:p/>
+        </p:txBody>
       </p:sp>
       <p:sp>
         <p:nvSpPr>
@@ -18336,6 +18516,10 @@
             <a:prstDash val="solid"/>
           </a:ln>
         </p:spPr>
+        <p:txBody>
+          <a:bodyPr/>
+          <a:p/>
+        </p:txBody>
       </p:sp>
       <p:sp>
         <p:nvSpPr>
@@ -18502,6 +18686,10 @@
             <a:prstDash val="solid"/>
           </a:ln>
         </p:spPr>
+        <p:txBody>
+          <a:bodyPr/>
+          <a:p/>
+        </p:txBody>
       </p:sp>
       <p:sp>
         <p:nvSpPr>
@@ -18531,6 +18719,10 @@
             <a:prstDash val="solid"/>
           </a:ln>
         </p:spPr>
+        <p:txBody>
+          <a:bodyPr/>
+          <a:p/>
+        </p:txBody>
       </p:sp>
       <p:sp>
         <p:nvSpPr>
@@ -18697,6 +18889,10 @@
             <a:prstDash val="solid"/>
           </a:ln>
         </p:spPr>
+        <p:txBody>
+          <a:bodyPr/>
+          <a:p/>
+        </p:txBody>
       </p:sp>
       <p:sp>
         <p:nvSpPr>
@@ -19145,6 +19341,10 @@
           </a:solidFill>
           <a:ln/>
         </p:spPr>
+        <p:txBody>
+          <a:bodyPr/>
+          <a:p/>
+        </p:txBody>
       </p:sp>
       <p:sp>
         <p:nvSpPr>
@@ -19172,6 +19372,10 @@
             <a:prstDash val="solid"/>
           </a:ln>
         </p:spPr>
+        <p:txBody>
+          <a:bodyPr/>
+          <a:p/>
+        </p:txBody>
       </p:sp>
       <p:sp>
         <p:nvSpPr>
@@ -19318,6 +19522,10 @@
             <a:prstDash val="dash"/>
           </a:ln>
         </p:spPr>
+        <p:txBody>
+          <a:bodyPr/>
+          <a:p/>
+        </p:txBody>
       </p:sp>
       <p:sp>
         <p:nvSpPr>
@@ -19433,7 +19641,7 @@
                 <a:ea typeface="Calibri" pitchFamily="34" charset="-122"/>
                 <a:cs typeface="Calibri" pitchFamily="34" charset="-120"/>
               </a:rPr>
-              <a:t>Confirm whether L'Oréal's specific ChatGPT ad placement — not just the platform's general capability — supports the market-level targeting/assignment and reporting required for the test.</a:t>
+              <a:t>Confirm whether L'Oréal's specific ChatGPT ad placement (not just the platform's general capability) supports the market-level targeting/assignment and reporting required for the test.</a:t>
             </a:r>
             <a:endParaRPr lang="en-US" sz="950" dirty="0"/>
           </a:p>
@@ -19509,6 +19717,10 @@
             <a:prstDash val="solid"/>
           </a:ln>
         </p:spPr>
+        <p:txBody>
+          <a:bodyPr/>
+          <a:p/>
+        </p:txBody>
       </p:sp>
       <p:sp>
         <p:nvSpPr>
@@ -19700,6 +19912,10 @@
             <a:prstDash val="solid"/>
           </a:ln>
         </p:spPr>
+        <p:txBody>
+          <a:bodyPr/>
+          <a:p/>
+        </p:txBody>
       </p:sp>
       <p:sp>
         <p:nvSpPr>
@@ -19857,7 +20073,7 @@
                 <a:ea typeface="Calibri" pitchFamily="34" charset="-122"/>
                 <a:cs typeface="Calibri" pitchFamily="34" charset="-120"/>
               </a:rPr>
-              <a:t>Inconclusive ≠ no effect. If statistical power is insufficient, redesign the test — do not call it zero impact.</a:t>
+              <a:t>Inconclusive ≠ no effect. If statistical power is insufficient, redesign the test; do not call it zero impact.</a:t>
             </a:r>
             <a:endParaRPr lang="en-US" sz="800" dirty="0"/>
           </a:p>
@@ -19891,6 +20107,10 @@
             <a:prstDash val="solid"/>
           </a:ln>
         </p:spPr>
+        <p:txBody>
+          <a:bodyPr/>
+          <a:p/>
+        </p:txBody>
       </p:sp>
       <p:sp>
         <p:nvSpPr>
@@ -20082,6 +20302,10 @@
             <a:prstDash val="solid"/>
           </a:ln>
         </p:spPr>
+        <p:txBody>
+          <a:bodyPr/>
+          <a:p/>
+        </p:txBody>
       </p:sp>
       <p:sp>
         <p:nvSpPr>
@@ -20158,7 +20382,7 @@
                 <a:ea typeface="Calibri" pitchFamily="34" charset="-122"/>
                 <a:cs typeface="Calibri" pitchFamily="34" charset="-120"/>
               </a:rPr>
-              <a:t>I initially framed the pilot around a geo-holdout test. I then checked whether public evidence established the targeting and reporting needed to run one. It didn't — so feasibility became Stage 1 rather than an assumption.</a:t>
+              <a:t>I initially framed the pilot around a geo-holdout test. I then checked whether public evidence established the targeting and reporting needed to run one. It didn't, so feasibility became Stage 1 rather than an assumption.</a:t>
             </a:r>
             <a:endParaRPr lang="en-US" sz="1050" dirty="0"/>
           </a:p>
@@ -20320,6 +20544,10 @@
           </a:solidFill>
           <a:ln/>
         </p:spPr>
+        <p:txBody>
+          <a:bodyPr/>
+          <a:p/>
+        </p:txBody>
       </p:sp>
       <p:sp>
         <p:nvSpPr>
@@ -20347,6 +20575,10 @@
             <a:prstDash val="solid"/>
           </a:ln>
         </p:spPr>
+        <p:txBody>
+          <a:bodyPr/>
+          <a:p/>
+        </p:txBody>
       </p:sp>
       <p:sp>
         <p:nvSpPr>
@@ -21554,6 +21786,10 @@
             <a:prstDash val="solid"/>
           </a:ln>
         </p:spPr>
+        <p:txBody>
+          <a:bodyPr/>
+          <a:p/>
+        </p:txBody>
       </p:sp>
       <p:sp>
         <p:nvSpPr>
